--- a/AWS AI_ML_Services_Usecase.pptx
+++ b/AWS AI_ML_Services_Usecase.pptx
@@ -5,11 +5,11 @@
     <p:sldMasterId id="2147483648" r:id="rId1"/>
   </p:sldMasterIdLst>
   <p:sldIdLst>
-    <p:sldId id="256" r:id="rId7"/>
-    <p:sldId id="257" r:id="rId8"/>
-    <p:sldId id="258" r:id="rId9"/>
-    <p:sldId id="259" r:id="rId10"/>
-    <p:sldId id="260" r:id="rId11"/>
+    <p:sldId id="256" r:id="rId2"/>
+    <p:sldId id="257" r:id="rId3"/>
+    <p:sldId id="258" r:id="rId4"/>
+    <p:sldId id="259" r:id="rId5"/>
+    <p:sldId id="260" r:id="rId6"/>
   </p:sldIdLst>
   <p:sldSz cx="9144000" cy="6858000" type="screen4x3"/>
   <p:notesSz cx="6858000" cy="9144000"/>
@@ -108,6 +108,22 @@
       </a:defRPr>
     </a:lvl9pPr>
   </p:defaultTextStyle>
+  <p:extLst>
+    <p:ext uri="{EFAFB233-063F-42B5-8137-9DF3F51BA10A}">
+      <p15:sldGuideLst xmlns:p15="http://schemas.microsoft.com/office/powerpoint/2012/main">
+        <p15:guide id="1" orient="horz" pos="2160">
+          <p15:clr>
+            <a:srgbClr val="A4A3A4"/>
+          </p15:clr>
+        </p15:guide>
+        <p15:guide id="2" pos="2880">
+          <p15:clr>
+            <a:srgbClr val="A4A3A4"/>
+          </p15:clr>
+        </p15:guide>
+      </p15:sldGuideLst>
+    </p:ext>
+  </p:extLst>
 </p:presentation>
 </file>
 
@@ -149,10 +165,9 @@
           <a:lstStyle/>
           <a:p>
             <a:r>
-              <a:rPr lang="en-US" smtClean="0"/>
+              <a:rPr lang="en-US"/>
               <a:t>Click to edit Master title style</a:t>
             </a:r>
-            <a:endParaRPr lang="en-US"/>
           </a:p>
         </p:txBody>
       </p:sp>
@@ -268,10 +283,9 @@
           </a:lstStyle>
           <a:p>
             <a:r>
-              <a:rPr lang="en-US" smtClean="0"/>
+              <a:rPr lang="en-US"/>
               <a:t>Click to edit Master subtitle style</a:t>
             </a:r>
-            <a:endParaRPr lang="en-US"/>
           </a:p>
         </p:txBody>
       </p:sp>
@@ -292,7 +306,7 @@
           <a:p>
             <a:fld id="{5BCAD085-E8A6-8845-BD4E-CB4CCA059FC4}" type="datetimeFigureOut">
               <a:rPr lang="en-US" smtClean="0"/>
-              <a:t>1/27/13</a:t>
+              <a:t>9/11/2025</a:t>
             </a:fld>
             <a:endParaRPr lang="en-US"/>
           </a:p>
@@ -386,10 +400,9 @@
           <a:lstStyle/>
           <a:p>
             <a:r>
-              <a:rPr lang="en-US" smtClean="0"/>
+              <a:rPr lang="en-US"/>
               <a:t>Click to edit Master title style</a:t>
             </a:r>
-            <a:endParaRPr lang="en-US"/>
           </a:p>
         </p:txBody>
       </p:sp>
@@ -410,38 +423,37 @@
           <a:p>
             <a:pPr lvl="0"/>
             <a:r>
-              <a:rPr lang="en-US" smtClean="0"/>
+              <a:rPr lang="en-US"/>
               <a:t>Click to edit Master text styles</a:t>
             </a:r>
           </a:p>
           <a:p>
             <a:pPr lvl="1"/>
             <a:r>
-              <a:rPr lang="en-US" smtClean="0"/>
+              <a:rPr lang="en-US"/>
               <a:t>Second level</a:t>
             </a:r>
           </a:p>
           <a:p>
             <a:pPr lvl="2"/>
             <a:r>
-              <a:rPr lang="en-US" smtClean="0"/>
+              <a:rPr lang="en-US"/>
               <a:t>Third level</a:t>
             </a:r>
           </a:p>
           <a:p>
             <a:pPr lvl="3"/>
             <a:r>
-              <a:rPr lang="en-US" smtClean="0"/>
+              <a:rPr lang="en-US"/>
               <a:t>Fourth level</a:t>
             </a:r>
           </a:p>
           <a:p>
             <a:pPr lvl="4"/>
             <a:r>
-              <a:rPr lang="en-US" smtClean="0"/>
+              <a:rPr lang="en-US"/>
               <a:t>Fifth level</a:t>
             </a:r>
-            <a:endParaRPr lang="en-US"/>
           </a:p>
         </p:txBody>
       </p:sp>
@@ -462,7 +474,7 @@
           <a:p>
             <a:fld id="{5BCAD085-E8A6-8845-BD4E-CB4CCA059FC4}" type="datetimeFigureOut">
               <a:rPr lang="en-US" smtClean="0"/>
-              <a:t>1/27/13</a:t>
+              <a:t>9/11/2025</a:t>
             </a:fld>
             <a:endParaRPr lang="en-US"/>
           </a:p>
@@ -561,10 +573,9 @@
           <a:lstStyle/>
           <a:p>
             <a:r>
-              <a:rPr lang="en-US" smtClean="0"/>
+              <a:rPr lang="en-US"/>
               <a:t>Click to edit Master title style</a:t>
             </a:r>
-            <a:endParaRPr lang="en-US"/>
           </a:p>
         </p:txBody>
       </p:sp>
@@ -590,38 +601,37 @@
           <a:p>
             <a:pPr lvl="0"/>
             <a:r>
-              <a:rPr lang="en-US" smtClean="0"/>
+              <a:rPr lang="en-US"/>
               <a:t>Click to edit Master text styles</a:t>
             </a:r>
           </a:p>
           <a:p>
             <a:pPr lvl="1"/>
             <a:r>
-              <a:rPr lang="en-US" smtClean="0"/>
+              <a:rPr lang="en-US"/>
               <a:t>Second level</a:t>
             </a:r>
           </a:p>
           <a:p>
             <a:pPr lvl="2"/>
             <a:r>
-              <a:rPr lang="en-US" smtClean="0"/>
+              <a:rPr lang="en-US"/>
               <a:t>Third level</a:t>
             </a:r>
           </a:p>
           <a:p>
             <a:pPr lvl="3"/>
             <a:r>
-              <a:rPr lang="en-US" smtClean="0"/>
+              <a:rPr lang="en-US"/>
               <a:t>Fourth level</a:t>
             </a:r>
           </a:p>
           <a:p>
             <a:pPr lvl="4"/>
             <a:r>
-              <a:rPr lang="en-US" smtClean="0"/>
+              <a:rPr lang="en-US"/>
               <a:t>Fifth level</a:t>
             </a:r>
-            <a:endParaRPr lang="en-US"/>
           </a:p>
         </p:txBody>
       </p:sp>
@@ -642,7 +652,7 @@
           <a:p>
             <a:fld id="{5BCAD085-E8A6-8845-BD4E-CB4CCA059FC4}" type="datetimeFigureOut">
               <a:rPr lang="en-US" smtClean="0"/>
-              <a:t>1/27/13</a:t>
+              <a:t>9/11/2025</a:t>
             </a:fld>
             <a:endParaRPr lang="en-US"/>
           </a:p>
@@ -736,10 +746,9 @@
           <a:lstStyle/>
           <a:p>
             <a:r>
-              <a:rPr lang="en-US" smtClean="0"/>
+              <a:rPr lang="en-US"/>
               <a:t>Click to edit Master title style</a:t>
             </a:r>
-            <a:endParaRPr lang="en-US"/>
           </a:p>
         </p:txBody>
       </p:sp>
@@ -760,38 +769,37 @@
           <a:p>
             <a:pPr lvl="0"/>
             <a:r>
-              <a:rPr lang="en-US" smtClean="0"/>
+              <a:rPr lang="en-US"/>
               <a:t>Click to edit Master text styles</a:t>
             </a:r>
           </a:p>
           <a:p>
             <a:pPr lvl="1"/>
             <a:r>
-              <a:rPr lang="en-US" smtClean="0"/>
+              <a:rPr lang="en-US"/>
               <a:t>Second level</a:t>
             </a:r>
           </a:p>
           <a:p>
             <a:pPr lvl="2"/>
             <a:r>
-              <a:rPr lang="en-US" smtClean="0"/>
+              <a:rPr lang="en-US"/>
               <a:t>Third level</a:t>
             </a:r>
           </a:p>
           <a:p>
             <a:pPr lvl="3"/>
             <a:r>
-              <a:rPr lang="en-US" smtClean="0"/>
+              <a:rPr lang="en-US"/>
               <a:t>Fourth level</a:t>
             </a:r>
           </a:p>
           <a:p>
             <a:pPr lvl="4"/>
             <a:r>
-              <a:rPr lang="en-US" smtClean="0"/>
+              <a:rPr lang="en-US"/>
               <a:t>Fifth level</a:t>
             </a:r>
-            <a:endParaRPr lang="en-US"/>
           </a:p>
         </p:txBody>
       </p:sp>
@@ -812,7 +820,7 @@
           <a:p>
             <a:fld id="{5BCAD085-E8A6-8845-BD4E-CB4CCA059FC4}" type="datetimeFigureOut">
               <a:rPr lang="en-US" smtClean="0"/>
-              <a:t>1/27/13</a:t>
+              <a:t>9/11/2025</a:t>
             </a:fld>
             <a:endParaRPr lang="en-US"/>
           </a:p>
@@ -915,10 +923,9 @@
           </a:lstStyle>
           <a:p>
             <a:r>
-              <a:rPr lang="en-US" smtClean="0"/>
+              <a:rPr lang="en-US"/>
               <a:t>Click to edit Master title style</a:t>
             </a:r>
-            <a:endParaRPr lang="en-US"/>
           </a:p>
         </p:txBody>
       </p:sp>
@@ -1035,7 +1042,7 @@
           <a:p>
             <a:pPr lvl="0"/>
             <a:r>
-              <a:rPr lang="en-US" smtClean="0"/>
+              <a:rPr lang="en-US"/>
               <a:t>Click to edit Master text styles</a:t>
             </a:r>
           </a:p>
@@ -1058,7 +1065,7 @@
           <a:p>
             <a:fld id="{5BCAD085-E8A6-8845-BD4E-CB4CCA059FC4}" type="datetimeFigureOut">
               <a:rPr lang="en-US" smtClean="0"/>
-              <a:t>1/27/13</a:t>
+              <a:t>9/11/2025</a:t>
             </a:fld>
             <a:endParaRPr lang="en-US"/>
           </a:p>
@@ -1152,10 +1159,9 @@
           <a:lstStyle/>
           <a:p>
             <a:r>
-              <a:rPr lang="en-US" smtClean="0"/>
+              <a:rPr lang="en-US"/>
               <a:t>Click to edit Master title style</a:t>
             </a:r>
-            <a:endParaRPr lang="en-US"/>
           </a:p>
         </p:txBody>
       </p:sp>
@@ -1209,38 +1215,37 @@
           <a:p>
             <a:pPr lvl="0"/>
             <a:r>
-              <a:rPr lang="en-US" smtClean="0"/>
+              <a:rPr lang="en-US"/>
               <a:t>Click to edit Master text styles</a:t>
             </a:r>
           </a:p>
           <a:p>
             <a:pPr lvl="1"/>
             <a:r>
-              <a:rPr lang="en-US" smtClean="0"/>
+              <a:rPr lang="en-US"/>
               <a:t>Second level</a:t>
             </a:r>
           </a:p>
           <a:p>
             <a:pPr lvl="2"/>
             <a:r>
-              <a:rPr lang="en-US" smtClean="0"/>
+              <a:rPr lang="en-US"/>
               <a:t>Third level</a:t>
             </a:r>
           </a:p>
           <a:p>
             <a:pPr lvl="3"/>
             <a:r>
-              <a:rPr lang="en-US" smtClean="0"/>
+              <a:rPr lang="en-US"/>
               <a:t>Fourth level</a:t>
             </a:r>
           </a:p>
           <a:p>
             <a:pPr lvl="4"/>
             <a:r>
-              <a:rPr lang="en-US" smtClean="0"/>
+              <a:rPr lang="en-US"/>
               <a:t>Fifth level</a:t>
             </a:r>
-            <a:endParaRPr lang="en-US"/>
           </a:p>
         </p:txBody>
       </p:sp>
@@ -1294,38 +1299,37 @@
           <a:p>
             <a:pPr lvl="0"/>
             <a:r>
-              <a:rPr lang="en-US" smtClean="0"/>
+              <a:rPr lang="en-US"/>
               <a:t>Click to edit Master text styles</a:t>
             </a:r>
           </a:p>
           <a:p>
             <a:pPr lvl="1"/>
             <a:r>
-              <a:rPr lang="en-US" smtClean="0"/>
+              <a:rPr lang="en-US"/>
               <a:t>Second level</a:t>
             </a:r>
           </a:p>
           <a:p>
             <a:pPr lvl="2"/>
             <a:r>
-              <a:rPr lang="en-US" smtClean="0"/>
+              <a:rPr lang="en-US"/>
               <a:t>Third level</a:t>
             </a:r>
           </a:p>
           <a:p>
             <a:pPr lvl="3"/>
             <a:r>
-              <a:rPr lang="en-US" smtClean="0"/>
+              <a:rPr lang="en-US"/>
               <a:t>Fourth level</a:t>
             </a:r>
           </a:p>
           <a:p>
             <a:pPr lvl="4"/>
             <a:r>
-              <a:rPr lang="en-US" smtClean="0"/>
+              <a:rPr lang="en-US"/>
               <a:t>Fifth level</a:t>
             </a:r>
-            <a:endParaRPr lang="en-US"/>
           </a:p>
         </p:txBody>
       </p:sp>
@@ -1346,7 +1350,7 @@
           <a:p>
             <a:fld id="{5BCAD085-E8A6-8845-BD4E-CB4CCA059FC4}" type="datetimeFigureOut">
               <a:rPr lang="en-US" smtClean="0"/>
-              <a:t>1/27/13</a:t>
+              <a:t>9/11/2025</a:t>
             </a:fld>
             <a:endParaRPr lang="en-US"/>
           </a:p>
@@ -1444,10 +1448,9 @@
           </a:lstStyle>
           <a:p>
             <a:r>
-              <a:rPr lang="en-US" smtClean="0"/>
+              <a:rPr lang="en-US"/>
               <a:t>Click to edit Master title style</a:t>
             </a:r>
-            <a:endParaRPr lang="en-US"/>
           </a:p>
         </p:txBody>
       </p:sp>
@@ -1510,7 +1513,7 @@
           <a:p>
             <a:pPr lvl="0"/>
             <a:r>
-              <a:rPr lang="en-US" smtClean="0"/>
+              <a:rPr lang="en-US"/>
               <a:t>Click to edit Master text styles</a:t>
             </a:r>
           </a:p>
@@ -1566,38 +1569,37 @@
           <a:p>
             <a:pPr lvl="0"/>
             <a:r>
-              <a:rPr lang="en-US" smtClean="0"/>
+              <a:rPr lang="en-US"/>
               <a:t>Click to edit Master text styles</a:t>
             </a:r>
           </a:p>
           <a:p>
             <a:pPr lvl="1"/>
             <a:r>
-              <a:rPr lang="en-US" smtClean="0"/>
+              <a:rPr lang="en-US"/>
               <a:t>Second level</a:t>
             </a:r>
           </a:p>
           <a:p>
             <a:pPr lvl="2"/>
             <a:r>
-              <a:rPr lang="en-US" smtClean="0"/>
+              <a:rPr lang="en-US"/>
               <a:t>Third level</a:t>
             </a:r>
           </a:p>
           <a:p>
             <a:pPr lvl="3"/>
             <a:r>
-              <a:rPr lang="en-US" smtClean="0"/>
+              <a:rPr lang="en-US"/>
               <a:t>Fourth level</a:t>
             </a:r>
           </a:p>
           <a:p>
             <a:pPr lvl="4"/>
             <a:r>
-              <a:rPr lang="en-US" smtClean="0"/>
+              <a:rPr lang="en-US"/>
               <a:t>Fifth level</a:t>
             </a:r>
-            <a:endParaRPr lang="en-US"/>
           </a:p>
         </p:txBody>
       </p:sp>
@@ -1660,7 +1662,7 @@
           <a:p>
             <a:pPr lvl="0"/>
             <a:r>
-              <a:rPr lang="en-US" smtClean="0"/>
+              <a:rPr lang="en-US"/>
               <a:t>Click to edit Master text styles</a:t>
             </a:r>
           </a:p>
@@ -1716,38 +1718,37 @@
           <a:p>
             <a:pPr lvl="0"/>
             <a:r>
-              <a:rPr lang="en-US" smtClean="0"/>
+              <a:rPr lang="en-US"/>
               <a:t>Click to edit Master text styles</a:t>
             </a:r>
           </a:p>
           <a:p>
             <a:pPr lvl="1"/>
             <a:r>
-              <a:rPr lang="en-US" smtClean="0"/>
+              <a:rPr lang="en-US"/>
               <a:t>Second level</a:t>
             </a:r>
           </a:p>
           <a:p>
             <a:pPr lvl="2"/>
             <a:r>
-              <a:rPr lang="en-US" smtClean="0"/>
+              <a:rPr lang="en-US"/>
               <a:t>Third level</a:t>
             </a:r>
           </a:p>
           <a:p>
             <a:pPr lvl="3"/>
             <a:r>
-              <a:rPr lang="en-US" smtClean="0"/>
+              <a:rPr lang="en-US"/>
               <a:t>Fourth level</a:t>
             </a:r>
           </a:p>
           <a:p>
             <a:pPr lvl="4"/>
             <a:r>
-              <a:rPr lang="en-US" smtClean="0"/>
+              <a:rPr lang="en-US"/>
               <a:t>Fifth level</a:t>
             </a:r>
-            <a:endParaRPr lang="en-US"/>
           </a:p>
         </p:txBody>
       </p:sp>
@@ -1768,7 +1769,7 @@
           <a:p>
             <a:fld id="{5BCAD085-E8A6-8845-BD4E-CB4CCA059FC4}" type="datetimeFigureOut">
               <a:rPr lang="en-US" smtClean="0"/>
-              <a:t>1/27/13</a:t>
+              <a:t>9/11/2025</a:t>
             </a:fld>
             <a:endParaRPr lang="en-US"/>
           </a:p>
@@ -1862,10 +1863,9 @@
           <a:lstStyle/>
           <a:p>
             <a:r>
-              <a:rPr lang="en-US" smtClean="0"/>
+              <a:rPr lang="en-US"/>
               <a:t>Click to edit Master title style</a:t>
             </a:r>
-            <a:endParaRPr lang="en-US"/>
           </a:p>
         </p:txBody>
       </p:sp>
@@ -1886,7 +1886,7 @@
           <a:p>
             <a:fld id="{5BCAD085-E8A6-8845-BD4E-CB4CCA059FC4}" type="datetimeFigureOut">
               <a:rPr lang="en-US" smtClean="0"/>
-              <a:t>1/27/13</a:t>
+              <a:t>9/11/2025</a:t>
             </a:fld>
             <a:endParaRPr lang="en-US"/>
           </a:p>
@@ -1981,7 +1981,7 @@
           <a:p>
             <a:fld id="{5BCAD085-E8A6-8845-BD4E-CB4CCA059FC4}" type="datetimeFigureOut">
               <a:rPr lang="en-US" smtClean="0"/>
-              <a:t>1/27/13</a:t>
+              <a:t>9/11/2025</a:t>
             </a:fld>
             <a:endParaRPr lang="en-US"/>
           </a:p>
@@ -2084,10 +2084,9 @@
           </a:lstStyle>
           <a:p>
             <a:r>
-              <a:rPr lang="en-US" smtClean="0"/>
+              <a:rPr lang="en-US"/>
               <a:t>Click to edit Master title style</a:t>
             </a:r>
-            <a:endParaRPr lang="en-US"/>
           </a:p>
         </p:txBody>
       </p:sp>
@@ -2141,38 +2140,37 @@
           <a:p>
             <a:pPr lvl="0"/>
             <a:r>
-              <a:rPr lang="en-US" smtClean="0"/>
+              <a:rPr lang="en-US"/>
               <a:t>Click to edit Master text styles</a:t>
             </a:r>
           </a:p>
           <a:p>
             <a:pPr lvl="1"/>
             <a:r>
-              <a:rPr lang="en-US" smtClean="0"/>
+              <a:rPr lang="en-US"/>
               <a:t>Second level</a:t>
             </a:r>
           </a:p>
           <a:p>
             <a:pPr lvl="2"/>
             <a:r>
-              <a:rPr lang="en-US" smtClean="0"/>
+              <a:rPr lang="en-US"/>
               <a:t>Third level</a:t>
             </a:r>
           </a:p>
           <a:p>
             <a:pPr lvl="3"/>
             <a:r>
-              <a:rPr lang="en-US" smtClean="0"/>
+              <a:rPr lang="en-US"/>
               <a:t>Fourth level</a:t>
             </a:r>
           </a:p>
           <a:p>
             <a:pPr lvl="4"/>
             <a:r>
-              <a:rPr lang="en-US" smtClean="0"/>
+              <a:rPr lang="en-US"/>
               <a:t>Fifth level</a:t>
             </a:r>
-            <a:endParaRPr lang="en-US"/>
           </a:p>
         </p:txBody>
       </p:sp>
@@ -2235,7 +2233,7 @@
           <a:p>
             <a:pPr lvl="0"/>
             <a:r>
-              <a:rPr lang="en-US" smtClean="0"/>
+              <a:rPr lang="en-US"/>
               <a:t>Click to edit Master text styles</a:t>
             </a:r>
           </a:p>
@@ -2258,7 +2256,7 @@
           <a:p>
             <a:fld id="{5BCAD085-E8A6-8845-BD4E-CB4CCA059FC4}" type="datetimeFigureOut">
               <a:rPr lang="en-US" smtClean="0"/>
-              <a:t>1/27/13</a:t>
+              <a:t>9/11/2025</a:t>
             </a:fld>
             <a:endParaRPr lang="en-US"/>
           </a:p>
@@ -2361,10 +2359,9 @@
           </a:lstStyle>
           <a:p>
             <a:r>
-              <a:rPr lang="en-US" smtClean="0"/>
+              <a:rPr lang="en-US"/>
               <a:t>Click to edit Master title style</a:t>
             </a:r>
-            <a:endParaRPr lang="en-US"/>
           </a:p>
         </p:txBody>
       </p:sp>
@@ -2488,7 +2485,7 @@
           <a:p>
             <a:pPr lvl="0"/>
             <a:r>
-              <a:rPr lang="en-US" smtClean="0"/>
+              <a:rPr lang="en-US"/>
               <a:t>Click to edit Master text styles</a:t>
             </a:r>
           </a:p>
@@ -2511,7 +2508,7 @@
           <a:p>
             <a:fld id="{5BCAD085-E8A6-8845-BD4E-CB4CCA059FC4}" type="datetimeFigureOut">
               <a:rPr lang="en-US" smtClean="0"/>
-              <a:t>1/27/13</a:t>
+              <a:t>9/11/2025</a:t>
             </a:fld>
             <a:endParaRPr lang="en-US"/>
           </a:p>
@@ -2620,10 +2617,9 @@
           <a:lstStyle/>
           <a:p>
             <a:r>
-              <a:rPr lang="en-US" smtClean="0"/>
+              <a:rPr lang="en-US"/>
               <a:t>Click to edit Master title style</a:t>
             </a:r>
-            <a:endParaRPr lang="en-US"/>
           </a:p>
         </p:txBody>
       </p:sp>
@@ -2654,38 +2650,37 @@
           <a:p>
             <a:pPr lvl="0"/>
             <a:r>
-              <a:rPr lang="en-US" smtClean="0"/>
+              <a:rPr lang="en-US"/>
               <a:t>Click to edit Master text styles</a:t>
             </a:r>
           </a:p>
           <a:p>
             <a:pPr lvl="1"/>
             <a:r>
-              <a:rPr lang="en-US" smtClean="0"/>
+              <a:rPr lang="en-US"/>
               <a:t>Second level</a:t>
             </a:r>
           </a:p>
           <a:p>
             <a:pPr lvl="2"/>
             <a:r>
-              <a:rPr lang="en-US" smtClean="0"/>
+              <a:rPr lang="en-US"/>
               <a:t>Third level</a:t>
             </a:r>
           </a:p>
           <a:p>
             <a:pPr lvl="3"/>
             <a:r>
-              <a:rPr lang="en-US" smtClean="0"/>
+              <a:rPr lang="en-US"/>
               <a:t>Fourth level</a:t>
             </a:r>
           </a:p>
           <a:p>
             <a:pPr lvl="4"/>
             <a:r>
-              <a:rPr lang="en-US" smtClean="0"/>
+              <a:rPr lang="en-US"/>
               <a:t>Fifth level</a:t>
             </a:r>
-            <a:endParaRPr lang="en-US"/>
           </a:p>
         </p:txBody>
       </p:sp>
@@ -2724,7 +2719,7 @@
           <a:p>
             <a:fld id="{5BCAD085-E8A6-8845-BD4E-CB4CCA059FC4}" type="datetimeFigureOut">
               <a:rPr lang="en-US" smtClean="0"/>
-              <a:t>1/27/13</a:t>
+              <a:t>9/11/2025</a:t>
             </a:fld>
             <a:endParaRPr lang="en-US"/>
           </a:p>
@@ -3083,7 +3078,7 @@
 </file>
 
 <file path=ppt/slides/slide1.xml><?xml version="1.0" encoding="utf-8"?>
-<p:sld xmlns:a="http://schemas.openxmlformats.org/drawingml/2006/main" xmlns:p="http://schemas.openxmlformats.org/presentationml/2006/main" xmlns:r="http://schemas.openxmlformats.org/officeDocument/2006/relationships">
+<p:sld xmlns:a="http://schemas.openxmlformats.org/drawingml/2006/main" xmlns:r="http://schemas.openxmlformats.org/officeDocument/2006/relationships" xmlns:p="http://schemas.openxmlformats.org/presentationml/2006/main">
   <p:cSld>
     <p:spTree>
       <p:nvGrpSpPr>
@@ -3091,7 +3086,14 @@
         <p:cNvGrpSpPr/>
         <p:nvPr/>
       </p:nvGrpSpPr>
-      <p:grpSpPr/>
+      <p:grpSpPr>
+        <a:xfrm>
+          <a:off x="0" y="0"/>
+          <a:ext cx="0" cy="0"/>
+          <a:chOff x="0" y="0"/>
+          <a:chExt cx="0" cy="0"/>
+        </a:xfrm>
+      </p:grpSpPr>
       <p:sp>
         <p:nvSpPr>
           <p:cNvPr id="2" name="Title 1"/>
@@ -3143,7 +3145,7 @@
 </file>
 
 <file path=ppt/slides/slide2.xml><?xml version="1.0" encoding="utf-8"?>
-<p:sld xmlns:a="http://schemas.openxmlformats.org/drawingml/2006/main" xmlns:p="http://schemas.openxmlformats.org/presentationml/2006/main" xmlns:r="http://schemas.openxmlformats.org/officeDocument/2006/relationships">
+<p:sld xmlns:a="http://schemas.openxmlformats.org/drawingml/2006/main" xmlns:r="http://schemas.openxmlformats.org/officeDocument/2006/relationships" xmlns:p="http://schemas.openxmlformats.org/presentationml/2006/main">
   <p:cSld>
     <p:spTree>
       <p:nvGrpSpPr>
@@ -3151,7 +3153,14 @@
         <p:cNvGrpSpPr/>
         <p:nvPr/>
       </p:nvGrpSpPr>
-      <p:grpSpPr/>
+      <p:grpSpPr>
+        <a:xfrm>
+          <a:off x="0" y="0"/>
+          <a:ext cx="0" cy="0"/>
+          <a:chOff x="0" y="0"/>
+          <a:chExt cx="0" cy="0"/>
+        </a:xfrm>
+      </p:grpSpPr>
       <p:sp>
         <p:nvSpPr>
           <p:cNvPr id="2" name="Title 1"/>
@@ -3185,14 +3194,19 @@
         </p:nvSpPr>
         <p:spPr/>
         <p:txBody>
-          <a:bodyPr/>
-          <a:lstStyle/>
-          <a:p/>
+          <a:bodyPr>
+            <a:normAutofit/>
+          </a:bodyPr>
+          <a:lstStyle/>
+          <a:p>
+            <a:endParaRPr sz="1400" dirty="0"/>
+          </a:p>
           <a:p>
             <a:pPr>
-              <a:defRPr b="1" sz="2000"/>
-            </a:pPr>
-            <a:r>
+              <a:defRPr sz="2000" b="1"/>
+            </a:pPr>
+            <a:r>
+              <a:rPr sz="1400" dirty="0"/>
               <a:t>📌 Features:</a:t>
             </a:r>
           </a:p>
@@ -3201,6 +3215,7 @@
               <a:defRPr sz="1800"/>
             </a:pPr>
             <a:r>
+              <a:rPr sz="1400" dirty="0"/>
               <a:t>OCR for printed + handwritten text</a:t>
             </a:r>
           </a:p>
@@ -3209,6 +3224,7 @@
               <a:defRPr sz="1800"/>
             </a:pPr>
             <a:r>
+              <a:rPr sz="1400" dirty="0"/>
               <a:t>Key-Value pair extraction from forms</a:t>
             </a:r>
           </a:p>
@@ -3217,6 +3233,7 @@
               <a:defRPr sz="1800"/>
             </a:pPr>
             <a:r>
+              <a:rPr sz="1400" dirty="0"/>
               <a:t>Table extraction with row/column structure</a:t>
             </a:r>
           </a:p>
@@ -3225,6 +3242,7 @@
               <a:defRPr sz="1800"/>
             </a:pPr>
             <a:r>
+              <a:rPr sz="1400" dirty="0"/>
               <a:t>Document classification</a:t>
             </a:r>
           </a:p>
@@ -3233,15 +3251,16 @@
               <a:defRPr sz="1800"/>
             </a:pPr>
             <a:r>
+              <a:rPr sz="1400" dirty="0"/>
               <a:t>Scalable &amp; integrates with AWS services</a:t>
             </a:r>
           </a:p>
           <a:p>
-            <a:br/>
-            <a:pPr>
-              <a:defRPr b="1" sz="2000"/>
-            </a:pPr>
-            <a:r>
+            <a:br>
+              <a:rPr sz="1400" dirty="0"/>
+            </a:br>
+            <a:r>
+              <a:rPr sz="1400" dirty="0"/>
               <a:t>📍 Example:</a:t>
             </a:r>
           </a:p>
@@ -3250,15 +3269,16 @@
               <a:defRPr sz="1800"/>
             </a:pPr>
             <a:r>
+              <a:rPr sz="1400" dirty="0"/>
               <a:t>Extract medical prescription details (patient, doctor, medicines, dosage) into JSON.</a:t>
             </a:r>
           </a:p>
           <a:p>
-            <a:br/>
-            <a:pPr>
-              <a:defRPr b="1" sz="2000"/>
-            </a:pPr>
-            <a:r>
+            <a:br>
+              <a:rPr sz="1400" dirty="0"/>
+            </a:br>
+            <a:r>
+              <a:rPr sz="1400" dirty="0"/>
               <a:t>📍 Use Cases:</a:t>
             </a:r>
           </a:p>
@@ -3267,6 +3287,7 @@
               <a:defRPr sz="1800"/>
             </a:pPr>
             <a:r>
+              <a:rPr sz="1400" dirty="0"/>
               <a:t>KYC document processing</a:t>
             </a:r>
           </a:p>
@@ -3275,6 +3296,7 @@
               <a:defRPr sz="1800"/>
             </a:pPr>
             <a:r>
+              <a:rPr sz="1400" dirty="0"/>
               <a:t>Invoice/receipt automation</a:t>
             </a:r>
           </a:p>
@@ -3283,6 +3305,7 @@
               <a:defRPr sz="1800"/>
             </a:pPr>
             <a:r>
+              <a:rPr sz="1400" dirty="0"/>
               <a:t>Insurance claim automation</a:t>
             </a:r>
           </a:p>
@@ -3291,6 +3314,7 @@
               <a:defRPr sz="1800"/>
             </a:pPr>
             <a:r>
+              <a:rPr sz="1400" dirty="0"/>
               <a:t>Digitizing legal/financial records</a:t>
             </a:r>
           </a:p>
@@ -3305,7 +3329,7 @@
 </file>
 
 <file path=ppt/slides/slide3.xml><?xml version="1.0" encoding="utf-8"?>
-<p:sld xmlns:a="http://schemas.openxmlformats.org/drawingml/2006/main" xmlns:p="http://schemas.openxmlformats.org/presentationml/2006/main" xmlns:r="http://schemas.openxmlformats.org/officeDocument/2006/relationships">
+<p:sld xmlns:a="http://schemas.openxmlformats.org/drawingml/2006/main" xmlns:r="http://schemas.openxmlformats.org/officeDocument/2006/relationships" xmlns:p="http://schemas.openxmlformats.org/presentationml/2006/main">
   <p:cSld>
     <p:spTree>
       <p:nvGrpSpPr>
@@ -3313,7 +3337,14 @@
         <p:cNvGrpSpPr/>
         <p:nvPr/>
       </p:nvGrpSpPr>
-      <p:grpSpPr/>
+      <p:grpSpPr>
+        <a:xfrm>
+          <a:off x="0" y="0"/>
+          <a:ext cx="0" cy="0"/>
+          <a:chOff x="0" y="0"/>
+          <a:chExt cx="0" cy="0"/>
+        </a:xfrm>
+      </p:grpSpPr>
       <p:sp>
         <p:nvSpPr>
           <p:cNvPr id="2" name="Title 1"/>
@@ -3347,14 +3378,19 @@
         </p:nvSpPr>
         <p:spPr/>
         <p:txBody>
-          <a:bodyPr/>
-          <a:lstStyle/>
-          <a:p/>
+          <a:bodyPr>
+            <a:normAutofit/>
+          </a:bodyPr>
+          <a:lstStyle/>
+          <a:p>
+            <a:endParaRPr sz="1400" dirty="0"/>
+          </a:p>
           <a:p>
             <a:pPr>
-              <a:defRPr b="1" sz="2000"/>
-            </a:pPr>
-            <a:r>
+              <a:defRPr sz="2000" b="1"/>
+            </a:pPr>
+            <a:r>
+              <a:rPr sz="1400" dirty="0"/>
               <a:t>📌 Features:</a:t>
             </a:r>
           </a:p>
@@ -3363,6 +3399,7 @@
               <a:defRPr sz="1800"/>
             </a:pPr>
             <a:r>
+              <a:rPr sz="1400" dirty="0"/>
               <a:t>Hub for foundation models (Claude, Llama, Titan, etc.)</a:t>
             </a:r>
           </a:p>
@@ -3371,6 +3408,7 @@
               <a:defRPr sz="1800"/>
             </a:pPr>
             <a:r>
+              <a:rPr sz="1400" dirty="0"/>
               <a:t>No infrastructure to manage, API-based</a:t>
             </a:r>
           </a:p>
@@ -3379,6 +3417,7 @@
               <a:defRPr sz="1800"/>
             </a:pPr>
             <a:r>
+              <a:rPr sz="1400" dirty="0"/>
               <a:t>Supports text, chat, and images (Stability AI)</a:t>
             </a:r>
           </a:p>
@@ -3387,6 +3426,7 @@
               <a:defRPr sz="1800"/>
             </a:pPr>
             <a:r>
+              <a:rPr sz="1400" dirty="0"/>
               <a:t>Fine-tuning with private data</a:t>
             </a:r>
           </a:p>
@@ -3395,15 +3435,16 @@
               <a:defRPr sz="1800"/>
             </a:pPr>
             <a:r>
+              <a:rPr sz="1400" dirty="0"/>
               <a:t>Agents for multi-step automation</a:t>
             </a:r>
           </a:p>
           <a:p>
-            <a:br/>
-            <a:pPr>
-              <a:defRPr b="1" sz="2000"/>
-            </a:pPr>
-            <a:r>
+            <a:br>
+              <a:rPr sz="1400" dirty="0"/>
+            </a:br>
+            <a:r>
+              <a:rPr sz="1400" dirty="0"/>
               <a:t>📍 Example:</a:t>
             </a:r>
           </a:p>
@@ -3412,15 +3453,16 @@
               <a:defRPr sz="1800"/>
             </a:pPr>
             <a:r>
+              <a:rPr sz="1400" dirty="0"/>
               <a:t>Summarize a 20-page HR policy document using Claude model.</a:t>
             </a:r>
           </a:p>
           <a:p>
-            <a:br/>
-            <a:pPr>
-              <a:defRPr b="1" sz="2000"/>
-            </a:pPr>
-            <a:r>
+            <a:br>
+              <a:rPr sz="1400" dirty="0"/>
+            </a:br>
+            <a:r>
+              <a:rPr sz="1400" dirty="0"/>
               <a:t>📍 Use Cases:</a:t>
             </a:r>
           </a:p>
@@ -3429,6 +3471,7 @@
               <a:defRPr sz="1800"/>
             </a:pPr>
             <a:r>
+              <a:rPr sz="1400" dirty="0"/>
               <a:t>Chatbots &amp; virtual assistants</a:t>
             </a:r>
           </a:p>
@@ -3437,6 +3480,7 @@
               <a:defRPr sz="1800"/>
             </a:pPr>
             <a:r>
+              <a:rPr sz="1400" dirty="0"/>
               <a:t>Summarization of reports/documents</a:t>
             </a:r>
           </a:p>
@@ -3445,6 +3489,7 @@
               <a:defRPr sz="1800"/>
             </a:pPr>
             <a:r>
+              <a:rPr sz="1400" dirty="0"/>
               <a:t>Content generation (blogs, marketing copy)</a:t>
             </a:r>
           </a:p>
@@ -3453,6 +3498,7 @@
               <a:defRPr sz="1800"/>
             </a:pPr>
             <a:r>
+              <a:rPr sz="1400" dirty="0"/>
               <a:t>Code generation &amp; explanation</a:t>
             </a:r>
           </a:p>
@@ -3467,7 +3513,7 @@
 </file>
 
 <file path=ppt/slides/slide4.xml><?xml version="1.0" encoding="utf-8"?>
-<p:sld xmlns:a="http://schemas.openxmlformats.org/drawingml/2006/main" xmlns:p="http://schemas.openxmlformats.org/presentationml/2006/main" xmlns:r="http://schemas.openxmlformats.org/officeDocument/2006/relationships">
+<p:sld xmlns:a="http://schemas.openxmlformats.org/drawingml/2006/main" xmlns:r="http://schemas.openxmlformats.org/officeDocument/2006/relationships" xmlns:p="http://schemas.openxmlformats.org/presentationml/2006/main">
   <p:cSld>
     <p:spTree>
       <p:nvGrpSpPr>
@@ -3475,7 +3521,14 @@
         <p:cNvGrpSpPr/>
         <p:nvPr/>
       </p:nvGrpSpPr>
-      <p:grpSpPr/>
+      <p:grpSpPr>
+        <a:xfrm>
+          <a:off x="0" y="0"/>
+          <a:ext cx="0" cy="0"/>
+          <a:chOff x="0" y="0"/>
+          <a:chExt cx="0" cy="0"/>
+        </a:xfrm>
+      </p:grpSpPr>
       <p:sp>
         <p:nvSpPr>
           <p:cNvPr id="2" name="Title 1"/>
@@ -3509,14 +3562,19 @@
         </p:nvSpPr>
         <p:spPr/>
         <p:txBody>
-          <a:bodyPr/>
-          <a:lstStyle/>
-          <a:p/>
+          <a:bodyPr>
+            <a:noAutofit/>
+          </a:bodyPr>
+          <a:lstStyle/>
+          <a:p>
+            <a:endParaRPr sz="1400" dirty="0"/>
+          </a:p>
           <a:p>
             <a:pPr>
-              <a:defRPr b="1" sz="2000"/>
-            </a:pPr>
-            <a:r>
+              <a:defRPr sz="2000" b="1"/>
+            </a:pPr>
+            <a:r>
+              <a:rPr sz="1400" dirty="0"/>
               <a:t>📌 Features:</a:t>
             </a:r>
           </a:p>
@@ -3525,6 +3583,7 @@
               <a:defRPr sz="1800"/>
             </a:pPr>
             <a:r>
+              <a:rPr sz="1400" dirty="0"/>
               <a:t>Sentiment analysis (positive, negative, neutral, mixed)</a:t>
             </a:r>
           </a:p>
@@ -3533,6 +3592,7 @@
               <a:defRPr sz="1800"/>
             </a:pPr>
             <a:r>
+              <a:rPr sz="1400" dirty="0"/>
               <a:t>Entity recognition (names, places, organizations)</a:t>
             </a:r>
           </a:p>
@@ -3541,6 +3601,7 @@
               <a:defRPr sz="1800"/>
             </a:pPr>
             <a:r>
+              <a:rPr sz="1400" dirty="0"/>
               <a:t>Key phrase extraction</a:t>
             </a:r>
           </a:p>
@@ -3549,6 +3610,7 @@
               <a:defRPr sz="1800"/>
             </a:pPr>
             <a:r>
+              <a:rPr sz="1400" dirty="0"/>
               <a:t>PII detection and redaction</a:t>
             </a:r>
           </a:p>
@@ -3557,6 +3619,7 @@
               <a:defRPr sz="1800"/>
             </a:pPr>
             <a:r>
+              <a:rPr sz="1400" dirty="0"/>
               <a:t>Topic modeling and document clustering</a:t>
             </a:r>
           </a:p>
@@ -3565,15 +3628,16 @@
               <a:defRPr sz="1800"/>
             </a:pPr>
             <a:r>
+              <a:rPr sz="1400" dirty="0"/>
               <a:t>Custom models for domain-specific NLP</a:t>
             </a:r>
           </a:p>
           <a:p>
-            <a:br/>
-            <a:pPr>
-              <a:defRPr b="1" sz="2000"/>
-            </a:pPr>
-            <a:r>
+            <a:br>
+              <a:rPr sz="1400" dirty="0"/>
+            </a:br>
+            <a:r>
+              <a:rPr sz="1400" dirty="0"/>
               <a:t>📍 Example:</a:t>
             </a:r>
           </a:p>
@@ -3582,15 +3646,16 @@
               <a:defRPr sz="1800"/>
             </a:pPr>
             <a:r>
+              <a:rPr sz="1400" dirty="0"/>
               <a:t>Analyze customer review: 'Delivery was quick, but packaging was damaged' → Sentiment: Mixed, Entities: Delivery, Packaging.</a:t>
             </a:r>
           </a:p>
           <a:p>
-            <a:br/>
-            <a:pPr>
-              <a:defRPr b="1" sz="2000"/>
-            </a:pPr>
-            <a:r>
+            <a:br>
+              <a:rPr sz="1400" dirty="0"/>
+            </a:br>
+            <a:r>
+              <a:rPr sz="1400" dirty="0"/>
               <a:t>📍 Use Cases:</a:t>
             </a:r>
           </a:p>
@@ -3599,6 +3664,7 @@
               <a:defRPr sz="1800"/>
             </a:pPr>
             <a:r>
+              <a:rPr sz="1400" dirty="0"/>
               <a:t>Customer feedback analysis</a:t>
             </a:r>
           </a:p>
@@ -3607,6 +3673,7 @@
               <a:defRPr sz="1800"/>
             </a:pPr>
             <a:r>
+              <a:rPr sz="1400" dirty="0"/>
               <a:t>Healthcare NLP (symptoms, diagnosis extraction)</a:t>
             </a:r>
           </a:p>
@@ -3615,6 +3682,7 @@
               <a:defRPr sz="1800"/>
             </a:pPr>
             <a:r>
+              <a:rPr sz="1400" dirty="0"/>
               <a:t>Compliance (PII detection &amp; masking)</a:t>
             </a:r>
           </a:p>
@@ -3623,6 +3691,7 @@
               <a:defRPr sz="1800"/>
             </a:pPr>
             <a:r>
+              <a:rPr sz="1400" dirty="0"/>
               <a:t>Organizing large document repositories</a:t>
             </a:r>
           </a:p>
@@ -3637,7 +3706,7 @@
 </file>
 
 <file path=ppt/slides/slide5.xml><?xml version="1.0" encoding="utf-8"?>
-<p:sld xmlns:a="http://schemas.openxmlformats.org/drawingml/2006/main" xmlns:p="http://schemas.openxmlformats.org/presentationml/2006/main" xmlns:r="http://schemas.openxmlformats.org/officeDocument/2006/relationships">
+<p:sld xmlns:a="http://schemas.openxmlformats.org/drawingml/2006/main" xmlns:r="http://schemas.openxmlformats.org/officeDocument/2006/relationships" xmlns:p="http://schemas.openxmlformats.org/presentationml/2006/main">
   <p:cSld>
     <p:spTree>
       <p:nvGrpSpPr>
@@ -3645,7 +3714,14 @@
         <p:cNvGrpSpPr/>
         <p:nvPr/>
       </p:nvGrpSpPr>
-      <p:grpSpPr/>
+      <p:grpSpPr>
+        <a:xfrm>
+          <a:off x="0" y="0"/>
+          <a:ext cx="0" cy="0"/>
+          <a:chOff x="0" y="0"/>
+          <a:chExt cx="0" cy="0"/>
+        </a:xfrm>
+      </p:grpSpPr>
       <p:sp>
         <p:nvSpPr>
           <p:cNvPr id="2" name="Title 1"/>
@@ -3679,14 +3755,19 @@
         </p:nvSpPr>
         <p:spPr/>
         <p:txBody>
-          <a:bodyPr/>
-          <a:lstStyle/>
-          <a:p/>
+          <a:bodyPr>
+            <a:noAutofit/>
+          </a:bodyPr>
+          <a:lstStyle/>
+          <a:p>
+            <a:endParaRPr sz="1400" dirty="0"/>
+          </a:p>
           <a:p>
             <a:pPr>
-              <a:defRPr b="1" sz="2000"/>
-            </a:pPr>
-            <a:r>
+              <a:defRPr sz="2000" b="1"/>
+            </a:pPr>
+            <a:r>
+              <a:rPr sz="1400" dirty="0"/>
               <a:t>📌 Features:</a:t>
             </a:r>
           </a:p>
@@ -3695,6 +3776,7 @@
               <a:defRPr sz="1800"/>
             </a:pPr>
             <a:r>
+              <a:rPr sz="1400" dirty="0"/>
               <a:t>Data preparation (Data Wrangler, Ground Truth)</a:t>
             </a:r>
           </a:p>
@@ -3703,6 +3785,7 @@
               <a:defRPr sz="1800"/>
             </a:pPr>
             <a:r>
+              <a:rPr sz="1400" dirty="0"/>
               <a:t>Model training (built-in algorithms or custom frameworks)</a:t>
             </a:r>
           </a:p>
@@ -3711,6 +3794,7 @@
               <a:defRPr sz="1800"/>
             </a:pPr>
             <a:r>
+              <a:rPr sz="1400" dirty="0"/>
               <a:t>Deployment (real-time, batch, edge)</a:t>
             </a:r>
           </a:p>
@@ -3719,7 +3803,12 @@
               <a:defRPr sz="1800"/>
             </a:pPr>
             <a:r>
-              <a:t>AutoML with SageMaker Autopilot</a:t>
+              <a:rPr sz="1400" dirty="0" err="1"/>
+              <a:t>AutoML</a:t>
+            </a:r>
+            <a:r>
+              <a:rPr sz="1400" dirty="0"/>
+              <a:t> with SageMaker Autopilot</a:t>
             </a:r>
           </a:p>
           <a:p>
@@ -3727,7 +3816,12 @@
               <a:defRPr sz="1800"/>
             </a:pPr>
             <a:r>
-              <a:t>MLOps with Pipelines &amp; Model Registry</a:t>
+              <a:rPr sz="1400" dirty="0" err="1"/>
+              <a:t>MLOps</a:t>
+            </a:r>
+            <a:r>
+              <a:rPr sz="1400" dirty="0"/>
+              <a:t> with Pipelines &amp; Model Registry</a:t>
             </a:r>
           </a:p>
           <a:p>
@@ -3735,15 +3829,16 @@
               <a:defRPr sz="1800"/>
             </a:pPr>
             <a:r>
+              <a:rPr sz="1400" dirty="0"/>
               <a:t>Monitoring for data/model drift</a:t>
             </a:r>
           </a:p>
           <a:p>
-            <a:br/>
-            <a:pPr>
-              <a:defRPr b="1" sz="2000"/>
-            </a:pPr>
-            <a:r>
+            <a:br>
+              <a:rPr sz="1400" dirty="0"/>
+            </a:br>
+            <a:r>
+              <a:rPr sz="1400" dirty="0"/>
               <a:t>📍 Example:</a:t>
             </a:r>
           </a:p>
@@ -3752,15 +3847,16 @@
               <a:defRPr sz="1800"/>
             </a:pPr>
             <a:r>
+              <a:rPr sz="1400" dirty="0"/>
               <a:t>Train fraud detection model with transaction data → Deploy endpoint → Real-time fraud alerts.</a:t>
             </a:r>
           </a:p>
           <a:p>
-            <a:br/>
-            <a:pPr>
-              <a:defRPr b="1" sz="2000"/>
-            </a:pPr>
-            <a:r>
+            <a:br>
+              <a:rPr sz="1400" dirty="0"/>
+            </a:br>
+            <a:r>
+              <a:rPr sz="1400" dirty="0"/>
               <a:t>📍 Use Cases:</a:t>
             </a:r>
           </a:p>
@@ -3769,6 +3865,7 @@
               <a:defRPr sz="1800"/>
             </a:pPr>
             <a:r>
+              <a:rPr sz="1400" dirty="0"/>
               <a:t>Fraud detection in finance</a:t>
             </a:r>
           </a:p>
@@ -3777,6 +3874,7 @@
               <a:defRPr sz="1800"/>
             </a:pPr>
             <a:r>
+              <a:rPr sz="1400" dirty="0"/>
               <a:t>Predictive maintenance in manufacturing</a:t>
             </a:r>
           </a:p>
@@ -3785,6 +3883,7 @@
               <a:defRPr sz="1800"/>
             </a:pPr>
             <a:r>
+              <a:rPr sz="1400" dirty="0"/>
               <a:t>Recommendation engines (e-commerce, OTT)</a:t>
             </a:r>
           </a:p>
@@ -3793,6 +3892,7 @@
               <a:defRPr sz="1800"/>
             </a:pPr>
             <a:r>
+              <a:rPr sz="1400" dirty="0"/>
               <a:t>Image recognition (defect detection, medical imaging)</a:t>
             </a:r>
           </a:p>
@@ -3801,6 +3901,7 @@
               <a:defRPr sz="1800"/>
             </a:pPr>
             <a:r>
+              <a:rPr sz="1400" dirty="0"/>
               <a:t>Custom ML beyond pre-trained services</a:t>
             </a:r>
           </a:p>
